--- a/dist/초1/국어/말과글/초1_국어_말과글_01_문장으로말하고쓰기.pptx
+++ b/dist/초1/국어/말과글/초1_국어_말과글_01_문장으로말하고쓰기.pptx
@@ -120,20 +120,20 @@
   <p:extLst>
     <p:ext uri="{521415D9-36F7-43E2-AB2F-B90AF26B5E84}">
       <p14:sectionLst xmlns:p14="http://schemas.microsoft.com/office/powerpoint/2010/main">
-        <p14:section name="도입" id="{717f62c8-4343-b321-7699-a358ade65f7b}">
+        <p14:section name="도입" id="{472995f8-f359-ea56-a7cc-57550bca8880}">
           <p14:sldIdLst>
             <p14:sldId id="256"/>
             <p14:sldId id="257"/>
           </p14:sldIdLst>
         </p14:section>
-        <p14:section name="개념" id="{d078f72b-0feb-1f75-f752-80eb441bb77f}">
+        <p14:section name="개념" id="{668c2486-7efb-3717-fb5c-746c6d260e45}">
           <p14:sldIdLst>
             <p14:sldId id="258"/>
             <p14:sldId id="259"/>
             <p14:sldId id="260"/>
           </p14:sldIdLst>
         </p14:section>
-        <p14:section name="연습" id="{267b0cd0-d351-c225-a368-422d2df89c9b}">
+        <p14:section name="연습" id="{f3b18d88-b831-2e83-6063-93f9d9010848}">
           <p14:sldIdLst>
             <p14:sldId id="261"/>
             <p14:sldId id="262"/>
@@ -141,19 +141,19 @@
             <p14:sldId id="264"/>
           </p14:sldIdLst>
         </p14:section>
-        <p14:section name="확인" id="{52311e02-5275-ccea-e6dc-4b7e7b9624a1}">
+        <p14:section name="확인" id="{942a5ad3-cca2-8184-fbc3-dc185d7015b8}">
           <p14:sldIdLst>
             <p14:sldId id="265"/>
             <p14:sldId id="266"/>
             <p14:sldId id="267"/>
           </p14:sldIdLst>
         </p14:section>
-        <p14:section name="정리" id="{9eb2d5c4-61dd-7d02-28d0-63b2163b1a34}">
+        <p14:section name="정리" id="{b2240c18-7bab-1df7-3e27-992247ba72e9}">
           <p14:sldIdLst>
             <p14:sldId id="268"/>
           </p14:sldIdLst>
         </p14:section>
-        <p14:section name="보충" id="{ebd88d37-c772-d0eb-e0bf-a63cad77ff31}">
+        <p14:section name="보충" id="{ba8f9216-98c8-f271-bdc4-1cb675f1cf98}">
           <p14:sldIdLst>
             <p14:sldId id="269"/>
           </p14:sldIdLst>

--- a/dist/초1/국어/말과글/초1_국어_말과글_01_문장으로말하고쓰기.pptx
+++ b/dist/초1/국어/말과글/초1_국어_말과글_01_문장으로말하고쓰기.pptx
@@ -120,20 +120,20 @@
   <p:extLst>
     <p:ext uri="{521415D9-36F7-43E2-AB2F-B90AF26B5E84}">
       <p14:sectionLst xmlns:p14="http://schemas.microsoft.com/office/powerpoint/2010/main">
-        <p14:section name="도입" id="{472995f8-f359-ea56-a7cc-57550bca8880}">
+        <p14:section name="도입" id="{0c644b2b-3d6f-b6a8-98fc-d47b0a77f935}">
           <p14:sldIdLst>
             <p14:sldId id="256"/>
             <p14:sldId id="257"/>
           </p14:sldIdLst>
         </p14:section>
-        <p14:section name="개념" id="{668c2486-7efb-3717-fb5c-746c6d260e45}">
+        <p14:section name="개념" id="{d4f71308-29c8-5335-f352-c9f654fa4a54}">
           <p14:sldIdLst>
             <p14:sldId id="258"/>
             <p14:sldId id="259"/>
             <p14:sldId id="260"/>
           </p14:sldIdLst>
         </p14:section>
-        <p14:section name="연습" id="{f3b18d88-b831-2e83-6063-93f9d9010848}">
+        <p14:section name="연습" id="{92f7aca3-380a-697a-1de8-94bb322f7412}">
           <p14:sldIdLst>
             <p14:sldId id="261"/>
             <p14:sldId id="262"/>
@@ -141,19 +141,19 @@
             <p14:sldId id="264"/>
           </p14:sldIdLst>
         </p14:section>
-        <p14:section name="확인" id="{942a5ad3-cca2-8184-fbc3-dc185d7015b8}">
+        <p14:section name="확인" id="{f05d0824-ddd9-abd8-b605-83d0763498e3}">
           <p14:sldIdLst>
             <p14:sldId id="265"/>
             <p14:sldId id="266"/>
             <p14:sldId id="267"/>
           </p14:sldIdLst>
         </p14:section>
-        <p14:section name="정리" id="{b2240c18-7bab-1df7-3e27-992247ba72e9}">
+        <p14:section name="정리" id="{5103312b-47e3-7af9-5126-0d1687db9254}">
           <p14:sldIdLst>
             <p14:sldId id="268"/>
           </p14:sldIdLst>
         </p14:section>
-        <p14:section name="보충" id="{ba8f9216-98c8-f271-bdc4-1cb675f1cf98}">
+        <p14:section name="보충" id="{87e9012a-d498-b5c6-d3d1-71746c6d4cc8}">
           <p14:sldIdLst>
             <p14:sldId id="269"/>
           </p14:sldIdLst>
